--- a/FFPM/FFPM 353.pptx
+++ b/FFPM/FFPM 353.pptx
@@ -109,6 +109,22 @@
       </a:defRPr>
     </a:lvl9pPr>
   </p:defaultTextStyle>
+  <p:extLst>
+    <p:ext uri="{EFAFB233-063F-42B5-8137-9DF3F51BA10A}">
+      <p15:sldGuideLst xmlns:p15="http://schemas.microsoft.com/office/powerpoint/2012/main">
+        <p15:guide id="1" orient="horz" pos="1620">
+          <p15:clr>
+            <a:srgbClr val="A4A3A4"/>
+          </p15:clr>
+        </p15:guide>
+        <p15:guide id="2" pos="2880">
+          <p15:clr>
+            <a:srgbClr val="A4A3A4"/>
+          </p15:clr>
+        </p15:guide>
+      </p15:sldGuideLst>
+    </p:ext>
+  </p:extLst>
 </p:presentation>
 </file>
 
@@ -293,7 +309,7 @@
           <a:p>
             <a:fld id="{71970F18-EA9F-4DB8-BCCC-BD6208E89799}" type="datetimeFigureOut">
               <a:rPr lang="fr-FR" smtClean="0"/>
-              <a:t>11/08/2014</a:t>
+              <a:t>01/03/2026</a:t>
             </a:fld>
             <a:endParaRPr lang="fr-FR"/>
           </a:p>
@@ -458,7 +474,7 @@
           <a:p>
             <a:fld id="{71970F18-EA9F-4DB8-BCCC-BD6208E89799}" type="datetimeFigureOut">
               <a:rPr lang="fr-FR" smtClean="0"/>
-              <a:t>11/08/2014</a:t>
+              <a:t>01/03/2026</a:t>
             </a:fld>
             <a:endParaRPr lang="fr-FR"/>
           </a:p>
@@ -633,7 +649,7 @@
           <a:p>
             <a:fld id="{71970F18-EA9F-4DB8-BCCC-BD6208E89799}" type="datetimeFigureOut">
               <a:rPr lang="fr-FR" smtClean="0"/>
-              <a:t>11/08/2014</a:t>
+              <a:t>01/03/2026</a:t>
             </a:fld>
             <a:endParaRPr lang="fr-FR"/>
           </a:p>
@@ -798,7 +814,7 @@
           <a:p>
             <a:fld id="{71970F18-EA9F-4DB8-BCCC-BD6208E89799}" type="datetimeFigureOut">
               <a:rPr lang="fr-FR" smtClean="0"/>
-              <a:t>11/08/2014</a:t>
+              <a:t>01/03/2026</a:t>
             </a:fld>
             <a:endParaRPr lang="fr-FR"/>
           </a:p>
@@ -1039,7 +1055,7 @@
           <a:p>
             <a:fld id="{71970F18-EA9F-4DB8-BCCC-BD6208E89799}" type="datetimeFigureOut">
               <a:rPr lang="fr-FR" smtClean="0"/>
-              <a:t>11/08/2014</a:t>
+              <a:t>01/03/2026</a:t>
             </a:fld>
             <a:endParaRPr lang="fr-FR"/>
           </a:p>
@@ -1322,7 +1338,7 @@
           <a:p>
             <a:fld id="{71970F18-EA9F-4DB8-BCCC-BD6208E89799}" type="datetimeFigureOut">
               <a:rPr lang="fr-FR" smtClean="0"/>
-              <a:t>11/08/2014</a:t>
+              <a:t>01/03/2026</a:t>
             </a:fld>
             <a:endParaRPr lang="fr-FR"/>
           </a:p>
@@ -1744,7 +1760,7 @@
           <a:p>
             <a:fld id="{71970F18-EA9F-4DB8-BCCC-BD6208E89799}" type="datetimeFigureOut">
               <a:rPr lang="fr-FR" smtClean="0"/>
-              <a:t>11/08/2014</a:t>
+              <a:t>01/03/2026</a:t>
             </a:fld>
             <a:endParaRPr lang="fr-FR"/>
           </a:p>
@@ -1857,7 +1873,7 @@
           <a:p>
             <a:fld id="{71970F18-EA9F-4DB8-BCCC-BD6208E89799}" type="datetimeFigureOut">
               <a:rPr lang="fr-FR" smtClean="0"/>
-              <a:t>11/08/2014</a:t>
+              <a:t>01/03/2026</a:t>
             </a:fld>
             <a:endParaRPr lang="fr-FR"/>
           </a:p>
@@ -1947,7 +1963,7 @@
           <a:p>
             <a:fld id="{71970F18-EA9F-4DB8-BCCC-BD6208E89799}" type="datetimeFigureOut">
               <a:rPr lang="fr-FR" smtClean="0"/>
-              <a:t>11/08/2014</a:t>
+              <a:t>01/03/2026</a:t>
             </a:fld>
             <a:endParaRPr lang="fr-FR"/>
           </a:p>
@@ -2219,7 +2235,7 @@
           <a:p>
             <a:fld id="{71970F18-EA9F-4DB8-BCCC-BD6208E89799}" type="datetimeFigureOut">
               <a:rPr lang="fr-FR" smtClean="0"/>
-              <a:t>11/08/2014</a:t>
+              <a:t>01/03/2026</a:t>
             </a:fld>
             <a:endParaRPr lang="fr-FR"/>
           </a:p>
@@ -2467,7 +2483,7 @@
           <a:p>
             <a:fld id="{71970F18-EA9F-4DB8-BCCC-BD6208E89799}" type="datetimeFigureOut">
               <a:rPr lang="fr-FR" smtClean="0"/>
-              <a:t>11/08/2014</a:t>
+              <a:t>01/03/2026</a:t>
             </a:fld>
             <a:endParaRPr lang="fr-FR"/>
           </a:p>
@@ -2675,7 +2691,7 @@
           <a:p>
             <a:fld id="{71970F18-EA9F-4DB8-BCCC-BD6208E89799}" type="datetimeFigureOut">
               <a:rPr lang="fr-FR" smtClean="0"/>
-              <a:t>11/08/2014</a:t>
+              <a:t>01/03/2026</a:t>
             </a:fld>
             <a:endParaRPr lang="fr-FR"/>
           </a:p>
@@ -3251,132 +3267,64 @@
             </a:br>
             <a:r>
               <a:rPr lang="fr-FR" sz="5400" b="1" dirty="0" smtClean="0"/>
-              <a:t>   </a:t>
-            </a:r>
-            <a:r>
-              <a:rPr lang="fr-FR" sz="5400" b="1" dirty="0" smtClean="0">
-                <a:solidFill>
-                  <a:srgbClr val="FF0000"/>
-                </a:solidFill>
-              </a:rPr>
-              <a:t>:,: </a:t>
-            </a:r>
-            <a:r>
-              <a:rPr lang="fr-FR" sz="5400" b="1" dirty="0" err="1" smtClean="0">
-                <a:solidFill>
-                  <a:srgbClr val="FF0000"/>
-                </a:solidFill>
-              </a:rPr>
+              <a:t>   :,: </a:t>
+            </a:r>
+            <a:r>
+              <a:rPr lang="fr-FR" sz="5400" b="1" dirty="0" err="1" smtClean="0"/>
               <a:t>Hevero</a:t>
             </a:r>
             <a:r>
-              <a:rPr lang="fr-FR" sz="5400" b="1" dirty="0" smtClean="0">
-                <a:solidFill>
-                  <a:srgbClr val="FF0000"/>
-                </a:solidFill>
-              </a:rPr>
+              <a:rPr lang="fr-FR" sz="5400" b="1" dirty="0" smtClean="0"/>
               <a:t>, ka </a:t>
             </a:r>
             <a:r>
-              <a:rPr lang="fr-FR" sz="5400" b="1" dirty="0" err="1" smtClean="0">
-                <a:solidFill>
-                  <a:srgbClr val="FF0000"/>
-                </a:solidFill>
-              </a:rPr>
+              <a:rPr lang="fr-FR" sz="5400" b="1" dirty="0" err="1" smtClean="0"/>
               <a:t>lazao</a:t>
             </a:r>
             <a:r>
-              <a:rPr lang="fr-FR" sz="5400" b="1" dirty="0" smtClean="0">
-                <a:solidFill>
-                  <a:srgbClr val="FF0000"/>
-                </a:solidFill>
-              </a:rPr>
+              <a:rPr lang="fr-FR" sz="5400" b="1" dirty="0" smtClean="0"/>
               <a:t>, </a:t>
             </a:r>
             <a:r>
-              <a:rPr lang="fr-FR" sz="5400" b="1" dirty="0" err="1" smtClean="0">
-                <a:solidFill>
-                  <a:srgbClr val="FF0000"/>
-                </a:solidFill>
-              </a:rPr>
+              <a:rPr lang="fr-FR" sz="5400" b="1" dirty="0" err="1" smtClean="0"/>
               <a:t>lazao</a:t>
             </a:r>
             <a:r>
-              <a:rPr lang="fr-FR" sz="5400" b="1" dirty="0" smtClean="0">
-                <a:solidFill>
-                  <a:srgbClr val="FF0000"/>
-                </a:solidFill>
-              </a:rPr>
+              <a:rPr lang="fr-FR" sz="5400" b="1" dirty="0" smtClean="0"/>
               <a:t/>
             </a:r>
             <a:br>
-              <a:rPr lang="fr-FR" sz="5400" b="1" dirty="0" smtClean="0">
-                <a:solidFill>
-                  <a:srgbClr val="FF0000"/>
-                </a:solidFill>
-              </a:rPr>
+              <a:rPr lang="fr-FR" sz="5400" b="1" dirty="0" smtClean="0"/>
             </a:br>
             <a:r>
-              <a:rPr lang="fr-FR" sz="5400" b="1" dirty="0" smtClean="0">
-                <a:solidFill>
-                  <a:srgbClr val="FF0000"/>
-                </a:solidFill>
-              </a:rPr>
+              <a:rPr lang="fr-FR" sz="5400" b="1" dirty="0" smtClean="0"/>
               <a:t>    </a:t>
             </a:r>
             <a:r>
-              <a:rPr lang="fr-FR" sz="5400" b="1" dirty="0" err="1" smtClean="0">
-                <a:solidFill>
-                  <a:srgbClr val="FF0000"/>
-                </a:solidFill>
-              </a:rPr>
+              <a:rPr lang="fr-FR" sz="5400" b="1" dirty="0" err="1" smtClean="0"/>
               <a:t>Izay</a:t>
             </a:r>
             <a:r>
-              <a:rPr lang="fr-FR" sz="5400" b="1" dirty="0" smtClean="0">
-                <a:solidFill>
-                  <a:srgbClr val="FF0000"/>
-                </a:solidFill>
-              </a:rPr>
+              <a:rPr lang="fr-FR" sz="5400" b="1" dirty="0" smtClean="0"/>
               <a:t> </a:t>
             </a:r>
             <a:r>
-              <a:rPr lang="fr-FR" sz="5400" b="1" dirty="0" err="1" smtClean="0">
-                <a:solidFill>
-                  <a:srgbClr val="FF0000"/>
-                </a:solidFill>
-              </a:rPr>
+              <a:rPr lang="fr-FR" sz="5400" b="1" dirty="0" err="1" smtClean="0"/>
               <a:t>mba</a:t>
             </a:r>
             <a:r>
-              <a:rPr lang="fr-FR" sz="5400" b="1" dirty="0" smtClean="0">
-                <a:solidFill>
-                  <a:srgbClr val="FF0000"/>
-                </a:solidFill>
-              </a:rPr>
+              <a:rPr lang="fr-FR" sz="5400" b="1" dirty="0" smtClean="0"/>
               <a:t> </a:t>
             </a:r>
             <a:r>
-              <a:rPr lang="fr-FR" sz="5400" b="1" dirty="0" err="1" smtClean="0">
-                <a:solidFill>
-                  <a:srgbClr val="FF0000"/>
-                </a:solidFill>
-              </a:rPr>
+              <a:rPr lang="fr-FR" sz="5400" b="1" dirty="0" err="1" smtClean="0"/>
               <a:t>vitanao</a:t>
             </a:r>
             <a:r>
-              <a:rPr lang="fr-FR" sz="5400" b="1" dirty="0" smtClean="0">
-                <a:solidFill>
-                  <a:srgbClr val="FF0000"/>
-                </a:solidFill>
-              </a:rPr>
+              <a:rPr lang="fr-FR" sz="5400" b="1" dirty="0" smtClean="0"/>
               <a:t> :,:</a:t>
             </a:r>
-            <a:endParaRPr lang="fr-FR" sz="5400" b="1" dirty="0">
-              <a:solidFill>
-                <a:srgbClr val="FF0000"/>
-              </a:solidFill>
-            </a:endParaRPr>
+            <a:endParaRPr lang="fr-FR" sz="5400" b="1" dirty="0"/>
           </a:p>
         </p:txBody>
       </p:sp>
@@ -3385,6 +3333,13 @@
   <p:clrMapOvr>
     <a:masterClrMapping/>
   </p:clrMapOvr>
+  <p:timing>
+    <p:tnLst>
+      <p:par>
+        <p:cTn id="1" dur="indefinite" restart="never" nodeType="tmRoot"/>
+      </p:par>
+    </p:tnLst>
+  </p:timing>
 </p:sld>
 </file>
 
@@ -3417,7 +3372,7 @@
         </p:nvSpPr>
         <p:spPr>
           <a:xfrm>
-            <a:off x="0" y="1"/>
+            <a:off x="0" y="-51470"/>
             <a:ext cx="9144000" cy="5143500"/>
           </a:xfrm>
         </p:spPr>
@@ -3428,237 +3383,173 @@
           <a:lstStyle/>
           <a:p>
             <a:r>
-              <a:rPr lang="fr-FR" sz="6000" b="1" dirty="0" smtClean="0"/>
+              <a:rPr lang="fr-FR" sz="5400" b="1" dirty="0" smtClean="0"/>
               <a:t>2. </a:t>
             </a:r>
             <a:r>
-              <a:rPr lang="fr-FR" sz="6000" b="1" dirty="0" err="1" smtClean="0"/>
+              <a:rPr lang="fr-FR" sz="5400" b="1" dirty="0" err="1" smtClean="0"/>
               <a:t>Ny</a:t>
             </a:r>
             <a:r>
-              <a:rPr lang="fr-FR" sz="6000" b="1" dirty="0" smtClean="0"/>
+              <a:rPr lang="fr-FR" sz="5400" b="1" dirty="0" smtClean="0"/>
               <a:t> </a:t>
             </a:r>
             <a:r>
-              <a:rPr lang="fr-FR" sz="6000" b="1" dirty="0" err="1" smtClean="0"/>
+              <a:rPr lang="fr-FR" sz="5400" b="1" dirty="0" err="1" smtClean="0"/>
               <a:t>lapako</a:t>
             </a:r>
             <a:r>
-              <a:rPr lang="fr-FR" sz="6000" b="1" dirty="0" smtClean="0"/>
+              <a:rPr lang="fr-FR" sz="5400" b="1" dirty="0" smtClean="0"/>
               <a:t> </a:t>
             </a:r>
             <a:r>
-              <a:rPr lang="fr-FR" sz="6000" b="1" dirty="0" err="1" smtClean="0"/>
+              <a:rPr lang="fr-FR" sz="5400" b="1" dirty="0" err="1" smtClean="0"/>
               <a:t>tarý</a:t>
             </a:r>
             <a:r>
-              <a:rPr lang="fr-FR" sz="6000" b="1" dirty="0" smtClean="0"/>
+              <a:rPr lang="fr-FR" sz="5400" b="1" dirty="0" smtClean="0"/>
               <a:t>,</a:t>
             </a:r>
             <a:br>
-              <a:rPr lang="fr-FR" sz="6000" b="1" dirty="0" smtClean="0"/>
+              <a:rPr lang="fr-FR" sz="5400" b="1" dirty="0" smtClean="0"/>
             </a:br>
             <a:r>
-              <a:rPr lang="fr-FR" sz="6000" b="1" dirty="0" smtClean="0"/>
+              <a:rPr lang="fr-FR" sz="5400" b="1" dirty="0" smtClean="0"/>
               <a:t>    </a:t>
             </a:r>
             <a:r>
-              <a:rPr lang="fr-FR" sz="6000" b="1" dirty="0" err="1" smtClean="0"/>
+              <a:rPr lang="fr-FR" sz="5400" b="1" dirty="0" err="1" smtClean="0"/>
               <a:t>Ny</a:t>
             </a:r>
             <a:r>
-              <a:rPr lang="fr-FR" sz="6000" b="1" dirty="0" smtClean="0"/>
+              <a:rPr lang="fr-FR" sz="5400" b="1" dirty="0" smtClean="0"/>
               <a:t> </a:t>
             </a:r>
             <a:r>
-              <a:rPr lang="fr-FR" sz="6000" b="1" dirty="0" err="1" smtClean="0"/>
+              <a:rPr lang="fr-FR" sz="5400" b="1" dirty="0" err="1" smtClean="0"/>
               <a:t>fahefako</a:t>
             </a:r>
             <a:r>
-              <a:rPr lang="fr-FR" sz="6000" b="1" dirty="0" smtClean="0"/>
+              <a:rPr lang="fr-FR" sz="5400" b="1" dirty="0" smtClean="0"/>
               <a:t> tao,</a:t>
             </a:r>
             <a:br>
-              <a:rPr lang="fr-FR" sz="6000" b="1" dirty="0" smtClean="0"/>
+              <a:rPr lang="fr-FR" sz="5400" b="1" dirty="0" smtClean="0"/>
             </a:br>
             <a:r>
-              <a:rPr lang="fr-FR" sz="6000" b="1" dirty="0" smtClean="0"/>
+              <a:rPr lang="fr-FR" sz="5400" b="1" dirty="0" smtClean="0"/>
               <a:t>   </a:t>
             </a:r>
             <a:r>
-              <a:rPr lang="fr-FR" sz="6000" b="1" dirty="0" err="1" smtClean="0"/>
+              <a:rPr lang="fr-FR" sz="5400" b="1" dirty="0" err="1" smtClean="0"/>
               <a:t>Nilaozako</a:t>
             </a:r>
             <a:r>
-              <a:rPr lang="fr-FR" sz="6000" b="1" dirty="0" smtClean="0"/>
+              <a:rPr lang="fr-FR" sz="5400" b="1" dirty="0" smtClean="0"/>
               <a:t> </a:t>
             </a:r>
             <a:r>
-              <a:rPr lang="fr-FR" sz="6000" b="1" dirty="0" err="1" smtClean="0"/>
+              <a:rPr lang="fr-FR" sz="5400" b="1" dirty="0" err="1" smtClean="0"/>
               <a:t>tatý</a:t>
             </a:r>
             <a:r>
-              <a:rPr lang="fr-FR" sz="6000" b="1" dirty="0" smtClean="0"/>
+              <a:rPr lang="fr-FR" sz="5400" b="1" dirty="0" smtClean="0"/>
               <a:t/>
             </a:r>
             <a:br>
-              <a:rPr lang="fr-FR" sz="6000" b="1" dirty="0" smtClean="0"/>
+              <a:rPr lang="fr-FR" sz="5400" b="1" dirty="0" smtClean="0"/>
             </a:br>
             <a:r>
-              <a:rPr lang="fr-FR" sz="6000" b="1" dirty="0" smtClean="0"/>
+              <a:rPr lang="fr-FR" sz="5400" b="1" dirty="0" smtClean="0"/>
               <a:t>    </a:t>
             </a:r>
             <a:r>
-              <a:rPr lang="fr-FR" sz="6000" b="1" dirty="0" err="1" smtClean="0"/>
+              <a:rPr lang="fr-FR" sz="5400" b="1" dirty="0" err="1" smtClean="0"/>
               <a:t>Hanavotra</a:t>
             </a:r>
             <a:r>
-              <a:rPr lang="fr-FR" sz="6000" b="1" dirty="0" smtClean="0"/>
+              <a:rPr lang="fr-FR" sz="5400" b="1" dirty="0" smtClean="0"/>
               <a:t> </a:t>
             </a:r>
             <a:r>
-              <a:rPr lang="fr-FR" sz="6000" b="1" dirty="0" err="1" smtClean="0"/>
+              <a:rPr lang="fr-FR" sz="5400" b="1" dirty="0" err="1" smtClean="0"/>
               <a:t>aina</a:t>
             </a:r>
             <a:r>
-              <a:rPr lang="fr-FR" sz="6000" b="1" dirty="0" smtClean="0"/>
+              <a:rPr lang="fr-FR" sz="5400" b="1" dirty="0" smtClean="0"/>
               <a:t> </a:t>
             </a:r>
             <a:r>
-              <a:rPr lang="fr-FR" sz="6000" b="1" dirty="0" err="1" smtClean="0"/>
+              <a:rPr lang="fr-FR" sz="5400" b="1" dirty="0" err="1" smtClean="0"/>
               <a:t>anao</a:t>
             </a:r>
             <a:r>
-              <a:rPr lang="fr-FR" sz="6000" b="1" dirty="0" smtClean="0"/>
+              <a:rPr lang="fr-FR" sz="5400" b="1" dirty="0" smtClean="0"/>
               <a:t> :</a:t>
             </a:r>
             <a:br>
-              <a:rPr lang="fr-FR" sz="6000" b="1" dirty="0" smtClean="0"/>
+              <a:rPr lang="fr-FR" sz="5400" b="1" dirty="0" smtClean="0"/>
             </a:br>
             <a:r>
-              <a:rPr lang="fr-FR" sz="6000" b="1" dirty="0" smtClean="0">
-                <a:solidFill>
-                  <a:srgbClr val="FF0000"/>
-                </a:solidFill>
-              </a:rPr>
+              <a:rPr lang="fr-FR" sz="5400" b="1" dirty="0" smtClean="0"/>
               <a:t>   :,: </a:t>
             </a:r>
             <a:r>
-              <a:rPr lang="fr-FR" sz="6000" b="1" dirty="0" err="1" smtClean="0">
-                <a:solidFill>
-                  <a:srgbClr val="FF0000"/>
-                </a:solidFill>
-              </a:rPr>
+              <a:rPr lang="fr-FR" sz="5400" b="1" dirty="0" err="1" smtClean="0"/>
               <a:t>Hevero</a:t>
             </a:r>
             <a:r>
-              <a:rPr lang="fr-FR" sz="6000" b="1" dirty="0" smtClean="0">
-                <a:solidFill>
-                  <a:srgbClr val="FF0000"/>
-                </a:solidFill>
-              </a:rPr>
+              <a:rPr lang="fr-FR" sz="5400" b="1" dirty="0" smtClean="0"/>
               <a:t>, ka </a:t>
             </a:r>
             <a:r>
-              <a:rPr lang="fr-FR" sz="6000" b="1" dirty="0" err="1" smtClean="0">
-                <a:solidFill>
-                  <a:srgbClr val="FF0000"/>
-                </a:solidFill>
-              </a:rPr>
+              <a:rPr lang="fr-FR" sz="5400" b="1" dirty="0" err="1" smtClean="0"/>
               <a:t>lazao</a:t>
             </a:r>
             <a:r>
-              <a:rPr lang="fr-FR" sz="6000" b="1" dirty="0" smtClean="0">
-                <a:solidFill>
-                  <a:srgbClr val="FF0000"/>
-                </a:solidFill>
-              </a:rPr>
+              <a:rPr lang="fr-FR" sz="5400" b="1" dirty="0" smtClean="0"/>
               <a:t>, </a:t>
             </a:r>
             <a:r>
-              <a:rPr lang="fr-FR" sz="6000" b="1" dirty="0" err="1" smtClean="0">
-                <a:solidFill>
-                  <a:srgbClr val="FF0000"/>
-                </a:solidFill>
-              </a:rPr>
+              <a:rPr lang="fr-FR" sz="5400" b="1" dirty="0" err="1" smtClean="0"/>
               <a:t>lazao</a:t>
             </a:r>
             <a:r>
-              <a:rPr lang="fr-FR" sz="6000" b="1" dirty="0" smtClean="0">
-                <a:solidFill>
-                  <a:srgbClr val="FF0000"/>
-                </a:solidFill>
-              </a:rPr>
+              <a:rPr lang="fr-FR" sz="5400" b="1" dirty="0" smtClean="0"/>
               <a:t/>
             </a:r>
             <a:br>
-              <a:rPr lang="fr-FR" sz="6000" b="1" dirty="0" smtClean="0">
-                <a:solidFill>
-                  <a:srgbClr val="FF0000"/>
-                </a:solidFill>
-              </a:rPr>
+              <a:rPr lang="fr-FR" sz="5400" b="1" dirty="0" smtClean="0"/>
             </a:br>
             <a:r>
-              <a:rPr lang="fr-FR" sz="6000" b="1" dirty="0" smtClean="0">
-                <a:solidFill>
-                  <a:srgbClr val="FF0000"/>
-                </a:solidFill>
-              </a:rPr>
+              <a:rPr lang="fr-FR" sz="5400" b="1" dirty="0" smtClean="0"/>
               <a:t>    </a:t>
             </a:r>
             <a:r>
-              <a:rPr lang="fr-FR" sz="6000" b="1" dirty="0" err="1" smtClean="0">
-                <a:solidFill>
-                  <a:srgbClr val="FF0000"/>
-                </a:solidFill>
-              </a:rPr>
+              <a:rPr lang="fr-FR" sz="5400" b="1" dirty="0" err="1" smtClean="0"/>
               <a:t>Izay</a:t>
             </a:r>
             <a:r>
-              <a:rPr lang="fr-FR" sz="6000" b="1" dirty="0" smtClean="0">
-                <a:solidFill>
-                  <a:srgbClr val="FF0000"/>
-                </a:solidFill>
-              </a:rPr>
+              <a:rPr lang="fr-FR" sz="5400" b="1" dirty="0" smtClean="0"/>
               <a:t> </a:t>
             </a:r>
             <a:r>
-              <a:rPr lang="fr-FR" sz="6000" b="1" dirty="0" err="1" smtClean="0">
-                <a:solidFill>
-                  <a:srgbClr val="FF0000"/>
-                </a:solidFill>
-              </a:rPr>
+              <a:rPr lang="fr-FR" sz="5400" b="1" dirty="0" err="1" smtClean="0"/>
               <a:t>mba</a:t>
             </a:r>
             <a:r>
-              <a:rPr lang="fr-FR" sz="6000" b="1" dirty="0" smtClean="0">
-                <a:solidFill>
-                  <a:srgbClr val="FF0000"/>
-                </a:solidFill>
-              </a:rPr>
+              <a:rPr lang="fr-FR" sz="5400" b="1" dirty="0" smtClean="0"/>
               <a:t> </a:t>
             </a:r>
             <a:r>
-              <a:rPr lang="fr-FR" sz="6000" b="1" dirty="0" err="1" smtClean="0">
-                <a:solidFill>
-                  <a:srgbClr val="FF0000"/>
-                </a:solidFill>
-              </a:rPr>
+              <a:rPr lang="fr-FR" sz="5400" b="1" dirty="0" err="1" smtClean="0"/>
               <a:t>foinao</a:t>
             </a:r>
             <a:r>
-              <a:rPr lang="fr-FR" sz="6000" b="1" dirty="0" smtClean="0">
-                <a:solidFill>
-                  <a:srgbClr val="FF0000"/>
-                </a:solidFill>
-              </a:rPr>
+              <a:rPr lang="fr-FR" sz="5400" b="1" dirty="0" smtClean="0"/>
               <a:t> :,:</a:t>
             </a:r>
-            <a:endParaRPr lang="fr-FR" sz="6000" b="1" dirty="0">
-              <a:solidFill>
-                <a:srgbClr val="FF0000"/>
-              </a:solidFill>
-            </a:endParaRPr>
+            <a:endParaRPr lang="fr-FR" sz="5400" b="1" dirty="0"/>
           </a:p>
         </p:txBody>
       </p:sp>
@@ -3667,6 +3558,13 @@
   <p:clrMapOvr>
     <a:masterClrMapping/>
   </p:clrMapOvr>
+  <p:timing>
+    <p:tnLst>
+      <p:par>
+        <p:cTn id="1" dur="indefinite" restart="never" nodeType="tmRoot"/>
+      </p:par>
+    </p:tnLst>
+  </p:timing>
 </p:sld>
 </file>
 
@@ -3710,241 +3608,173 @@
           <a:lstStyle/>
           <a:p>
             <a:r>
-              <a:rPr lang="fr-FR" sz="6000" b="1" dirty="0" smtClean="0"/>
+              <a:rPr lang="fr-FR" sz="5400" b="1" dirty="0" smtClean="0"/>
               <a:t>3. </a:t>
             </a:r>
             <a:r>
-              <a:rPr lang="fr-FR" sz="6000" b="1" dirty="0" err="1" smtClean="0"/>
-              <a:t>Hevronao</a:t>
-            </a:r>
-            <a:r>
-              <a:rPr lang="fr-FR" sz="6000" b="1" dirty="0" smtClean="0"/>
+              <a:rPr lang="fr-FR" sz="5400" b="1" dirty="0" err="1" smtClean="0"/>
+              <a:t>Heveronao</a:t>
+            </a:r>
+            <a:r>
+              <a:rPr lang="fr-FR" sz="5400" b="1" dirty="0" smtClean="0"/>
               <a:t> ange,</a:t>
             </a:r>
             <a:br>
-              <a:rPr lang="fr-FR" sz="6000" b="1" dirty="0" smtClean="0"/>
+              <a:rPr lang="fr-FR" sz="5400" b="1" dirty="0" smtClean="0"/>
             </a:br>
             <a:r>
-              <a:rPr lang="fr-FR" sz="6000" b="1" dirty="0" smtClean="0"/>
+              <a:rPr lang="fr-FR" sz="5400" b="1" dirty="0" smtClean="0"/>
               <a:t>    </a:t>
             </a:r>
             <a:r>
-              <a:rPr lang="fr-FR" sz="6000" b="1" dirty="0" err="1" smtClean="0"/>
+              <a:rPr lang="fr-FR" sz="5400" b="1" dirty="0" err="1" smtClean="0"/>
               <a:t>Ny</a:t>
             </a:r>
             <a:r>
-              <a:rPr lang="fr-FR" sz="6000" b="1" dirty="0" smtClean="0"/>
+              <a:rPr lang="fr-FR" sz="5400" b="1" dirty="0" smtClean="0"/>
               <a:t> </a:t>
             </a:r>
             <a:r>
-              <a:rPr lang="fr-FR" sz="6000" b="1" dirty="0" err="1" smtClean="0"/>
+              <a:rPr lang="fr-FR" sz="5400" b="1" dirty="0" err="1" smtClean="0"/>
               <a:t>nisoloanao</a:t>
             </a:r>
             <a:r>
-              <a:rPr lang="fr-FR" sz="6000" b="1" dirty="0" smtClean="0"/>
+              <a:rPr lang="fr-FR" sz="5400" b="1" dirty="0" smtClean="0"/>
               <a:t> </a:t>
             </a:r>
             <a:r>
-              <a:rPr lang="fr-FR" sz="6000" b="1" dirty="0" err="1" smtClean="0"/>
+              <a:rPr lang="fr-FR" sz="5400" b="1" dirty="0" err="1" smtClean="0"/>
               <a:t>anao</a:t>
             </a:r>
             <a:r>
-              <a:rPr lang="fr-FR" sz="6000" b="1" dirty="0" smtClean="0"/>
+              <a:rPr lang="fr-FR" sz="5400" b="1" dirty="0" smtClean="0"/>
               <a:t> ;</a:t>
             </a:r>
             <a:br>
-              <a:rPr lang="fr-FR" sz="6000" b="1" dirty="0" smtClean="0"/>
+              <a:rPr lang="fr-FR" sz="5400" b="1" dirty="0" smtClean="0"/>
             </a:br>
             <a:r>
-              <a:rPr lang="fr-FR" sz="6000" b="1" dirty="0" smtClean="0"/>
+              <a:rPr lang="fr-FR" sz="5400" b="1" dirty="0" smtClean="0"/>
               <a:t>   </a:t>
             </a:r>
             <a:r>
-              <a:rPr lang="fr-FR" sz="6000" b="1" dirty="0" err="1" smtClean="0"/>
+              <a:rPr lang="fr-FR" sz="5400" b="1" dirty="0" err="1" smtClean="0"/>
               <a:t>Nangidy</a:t>
             </a:r>
             <a:r>
-              <a:rPr lang="fr-FR" sz="6000" b="1" dirty="0" smtClean="0"/>
+              <a:rPr lang="fr-FR" sz="5400" b="1" dirty="0" smtClean="0"/>
               <a:t> </a:t>
             </a:r>
             <a:r>
-              <a:rPr lang="fr-FR" sz="6000" b="1" dirty="0" err="1" smtClean="0"/>
+              <a:rPr lang="fr-FR" sz="5400" b="1" dirty="0" err="1" smtClean="0"/>
               <a:t>indrindra</a:t>
             </a:r>
             <a:r>
-              <a:rPr lang="fr-FR" sz="6000" b="1" dirty="0" smtClean="0"/>
+              <a:rPr lang="fr-FR" sz="5400" b="1" dirty="0" smtClean="0"/>
               <a:t> </a:t>
             </a:r>
             <a:r>
-              <a:rPr lang="fr-FR" sz="6000" b="1" dirty="0" err="1" smtClean="0"/>
+              <a:rPr lang="fr-FR" sz="5400" b="1" dirty="0" err="1" smtClean="0"/>
               <a:t>anie</a:t>
             </a:r>
             <a:r>
-              <a:rPr lang="fr-FR" sz="6000" b="1" dirty="0" smtClean="0"/>
+              <a:rPr lang="fr-FR" sz="5400" b="1" dirty="0" smtClean="0"/>
               <a:t/>
             </a:r>
             <a:br>
-              <a:rPr lang="fr-FR" sz="6000" b="1" dirty="0" smtClean="0"/>
+              <a:rPr lang="fr-FR" sz="5400" b="1" dirty="0" smtClean="0"/>
             </a:br>
             <a:r>
-              <a:rPr lang="fr-FR" sz="6000" b="1" dirty="0" smtClean="0"/>
+              <a:rPr lang="fr-FR" sz="5400" b="1" dirty="0" smtClean="0"/>
               <a:t>    </a:t>
             </a:r>
             <a:r>
-              <a:rPr lang="fr-FR" sz="6000" b="1" dirty="0" err="1" smtClean="0"/>
+              <a:rPr lang="fr-FR" sz="5400" b="1" dirty="0" err="1" smtClean="0"/>
               <a:t>Ny</a:t>
             </a:r>
             <a:r>
-              <a:rPr lang="fr-FR" sz="6000" b="1" dirty="0" smtClean="0"/>
+              <a:rPr lang="fr-FR" sz="5400" b="1" dirty="0" smtClean="0"/>
               <a:t> </a:t>
             </a:r>
             <a:r>
-              <a:rPr lang="fr-FR" sz="6000" b="1" dirty="0" err="1" smtClean="0"/>
+              <a:rPr lang="fr-FR" sz="5400" b="1" dirty="0" err="1" smtClean="0"/>
               <a:t>nahazoana</a:t>
             </a:r>
             <a:r>
-              <a:rPr lang="fr-FR" sz="6000" b="1" dirty="0" smtClean="0"/>
+              <a:rPr lang="fr-FR" sz="5400" b="1" dirty="0" smtClean="0"/>
               <a:t> </a:t>
             </a:r>
             <a:r>
-              <a:rPr lang="fr-FR" sz="6000" b="1" dirty="0" err="1" smtClean="0"/>
+              <a:rPr lang="fr-FR" sz="5400" b="1" dirty="0" err="1" smtClean="0"/>
               <a:t>anao</a:t>
             </a:r>
             <a:r>
-              <a:rPr lang="fr-FR" sz="6000" b="1" dirty="0" smtClean="0"/>
+              <a:rPr lang="fr-FR" sz="5400" b="1" dirty="0" smtClean="0"/>
               <a:t> :</a:t>
             </a:r>
             <a:br>
-              <a:rPr lang="fr-FR" sz="6000" b="1" dirty="0" smtClean="0"/>
+              <a:rPr lang="fr-FR" sz="5400" b="1" dirty="0" smtClean="0"/>
             </a:br>
             <a:r>
-              <a:rPr lang="fr-FR" sz="6000" b="1" dirty="0" smtClean="0"/>
-              <a:t>   </a:t>
-            </a:r>
-            <a:r>
-              <a:rPr lang="fr-FR" sz="6000" b="1" dirty="0" smtClean="0">
-                <a:solidFill>
-                  <a:srgbClr val="FF0000"/>
-                </a:solidFill>
-              </a:rPr>
-              <a:t>:,: </a:t>
-            </a:r>
-            <a:r>
-              <a:rPr lang="fr-FR" sz="6000" b="1" dirty="0" err="1" smtClean="0">
-                <a:solidFill>
-                  <a:srgbClr val="FF0000"/>
-                </a:solidFill>
-              </a:rPr>
+              <a:rPr lang="fr-FR" sz="5400" b="1" dirty="0" smtClean="0"/>
+              <a:t>   :,: </a:t>
+            </a:r>
+            <a:r>
+              <a:rPr lang="fr-FR" sz="5400" b="1" dirty="0" err="1" smtClean="0"/>
               <a:t>Hevero</a:t>
             </a:r>
             <a:r>
-              <a:rPr lang="fr-FR" sz="6000" b="1" dirty="0" smtClean="0">
-                <a:solidFill>
-                  <a:srgbClr val="FF0000"/>
-                </a:solidFill>
-              </a:rPr>
+              <a:rPr lang="fr-FR" sz="5400" b="1" dirty="0" smtClean="0"/>
               <a:t>, ka </a:t>
             </a:r>
             <a:r>
-              <a:rPr lang="fr-FR" sz="6000" b="1" dirty="0" err="1" smtClean="0">
-                <a:solidFill>
-                  <a:srgbClr val="FF0000"/>
-                </a:solidFill>
-              </a:rPr>
+              <a:rPr lang="fr-FR" sz="5400" b="1" dirty="0" err="1" smtClean="0"/>
               <a:t>lazao</a:t>
             </a:r>
             <a:r>
-              <a:rPr lang="fr-FR" sz="6000" b="1" dirty="0" smtClean="0">
-                <a:solidFill>
-                  <a:srgbClr val="FF0000"/>
-                </a:solidFill>
-              </a:rPr>
+              <a:rPr lang="fr-FR" sz="5400" b="1" dirty="0" smtClean="0"/>
               <a:t>, </a:t>
             </a:r>
             <a:r>
-              <a:rPr lang="fr-FR" sz="6000" b="1" dirty="0" err="1" smtClean="0">
-                <a:solidFill>
-                  <a:srgbClr val="FF0000"/>
-                </a:solidFill>
-              </a:rPr>
+              <a:rPr lang="fr-FR" sz="5400" b="1" dirty="0" err="1" smtClean="0"/>
               <a:t>lazao</a:t>
             </a:r>
             <a:r>
-              <a:rPr lang="fr-FR" sz="6000" b="1" dirty="0" smtClean="0">
-                <a:solidFill>
-                  <a:srgbClr val="FF0000"/>
-                </a:solidFill>
-              </a:rPr>
+              <a:rPr lang="fr-FR" sz="5400" b="1" dirty="0" smtClean="0"/>
               <a:t/>
             </a:r>
             <a:br>
-              <a:rPr lang="fr-FR" sz="6000" b="1" dirty="0" smtClean="0">
-                <a:solidFill>
-                  <a:srgbClr val="FF0000"/>
-                </a:solidFill>
-              </a:rPr>
+              <a:rPr lang="fr-FR" sz="5400" b="1" dirty="0" smtClean="0"/>
             </a:br>
             <a:r>
-              <a:rPr lang="fr-FR" sz="6000" b="1" dirty="0" smtClean="0">
-                <a:solidFill>
-                  <a:srgbClr val="FF0000"/>
-                </a:solidFill>
-              </a:rPr>
+              <a:rPr lang="fr-FR" sz="5400" b="1" dirty="0" smtClean="0"/>
               <a:t>    </a:t>
             </a:r>
             <a:r>
-              <a:rPr lang="fr-FR" sz="6000" b="1" dirty="0" err="1" smtClean="0">
-                <a:solidFill>
-                  <a:srgbClr val="FF0000"/>
-                </a:solidFill>
-              </a:rPr>
+              <a:rPr lang="fr-FR" sz="5400" b="1" dirty="0" err="1" smtClean="0"/>
               <a:t>Izay</a:t>
             </a:r>
             <a:r>
-              <a:rPr lang="fr-FR" sz="6000" b="1" dirty="0" smtClean="0">
-                <a:solidFill>
-                  <a:srgbClr val="FF0000"/>
-                </a:solidFill>
-              </a:rPr>
+              <a:rPr lang="fr-FR" sz="5400" b="1" dirty="0" smtClean="0"/>
               <a:t> </a:t>
             </a:r>
             <a:r>
-              <a:rPr lang="fr-FR" sz="6000" b="1" dirty="0" err="1" smtClean="0">
-                <a:solidFill>
-                  <a:srgbClr val="FF0000"/>
-                </a:solidFill>
-              </a:rPr>
+              <a:rPr lang="fr-FR" sz="5400" b="1" dirty="0" err="1" smtClean="0"/>
               <a:t>mba</a:t>
             </a:r>
             <a:r>
-              <a:rPr lang="fr-FR" sz="6000" b="1" dirty="0" smtClean="0">
-                <a:solidFill>
-                  <a:srgbClr val="FF0000"/>
-                </a:solidFill>
-              </a:rPr>
+              <a:rPr lang="fr-FR" sz="5400" b="1" dirty="0" smtClean="0"/>
               <a:t> </a:t>
             </a:r>
             <a:r>
-              <a:rPr lang="fr-FR" sz="6000" b="1" dirty="0" err="1" smtClean="0">
-                <a:solidFill>
-                  <a:srgbClr val="FF0000"/>
-                </a:solidFill>
-              </a:rPr>
+              <a:rPr lang="fr-FR" sz="5400" b="1" dirty="0" err="1" smtClean="0"/>
               <a:t>nentinao</a:t>
             </a:r>
             <a:r>
-              <a:rPr lang="fr-FR" sz="6000" b="1" dirty="0" smtClean="0">
-                <a:solidFill>
-                  <a:srgbClr val="FF0000"/>
-                </a:solidFill>
-              </a:rPr>
+              <a:rPr lang="fr-FR" sz="5400" b="1" dirty="0" smtClean="0"/>
               <a:t> :,:</a:t>
             </a:r>
-            <a:endParaRPr lang="fr-FR" sz="6000" b="1" dirty="0">
-              <a:solidFill>
-                <a:srgbClr val="FF0000"/>
-              </a:solidFill>
-            </a:endParaRPr>
+            <a:endParaRPr lang="fr-FR" sz="5400" b="1" dirty="0"/>
           </a:p>
         </p:txBody>
       </p:sp>
@@ -3953,6 +3783,13 @@
   <p:clrMapOvr>
     <a:masterClrMapping/>
   </p:clrMapOvr>
+  <p:timing>
+    <p:tnLst>
+      <p:par>
+        <p:cTn id="1" dur="indefinite" restart="never" nodeType="tmRoot"/>
+      </p:par>
+    </p:tnLst>
+  </p:timing>
 </p:sld>
 </file>
 
@@ -3996,261 +3833,197 @@
           <a:lstStyle/>
           <a:p>
             <a:r>
-              <a:rPr lang="fr-FR" sz="6000" b="1" dirty="0" smtClean="0"/>
+              <a:rPr lang="fr-FR" sz="5400" b="1" dirty="0" smtClean="0"/>
               <a:t>4. </a:t>
             </a:r>
             <a:r>
-              <a:rPr lang="fr-FR" sz="6000" b="1" dirty="0" err="1" smtClean="0"/>
+              <a:rPr lang="fr-FR" sz="5400" b="1" dirty="0" err="1" smtClean="0"/>
               <a:t>Endre</a:t>
             </a:r>
             <a:r>
-              <a:rPr lang="fr-FR" sz="6000" b="1" dirty="0" smtClean="0"/>
+              <a:rPr lang="fr-FR" sz="5400" b="1" dirty="0" smtClean="0"/>
               <a:t> ! </a:t>
             </a:r>
             <a:r>
-              <a:rPr lang="fr-FR" sz="6000" b="1" dirty="0" err="1" smtClean="0"/>
+              <a:rPr lang="fr-FR" sz="5400" b="1" dirty="0" err="1" smtClean="0"/>
               <a:t>ny</a:t>
             </a:r>
             <a:r>
-              <a:rPr lang="fr-FR" sz="6000" b="1" dirty="0" smtClean="0"/>
+              <a:rPr lang="fr-FR" sz="5400" b="1" dirty="0" smtClean="0"/>
               <a:t> </a:t>
             </a:r>
             <a:r>
-              <a:rPr lang="fr-FR" sz="6000" b="1" dirty="0" err="1" smtClean="0"/>
+              <a:rPr lang="fr-FR" sz="5400" b="1" dirty="0" err="1" smtClean="0"/>
               <a:t>aiko</a:t>
             </a:r>
             <a:r>
-              <a:rPr lang="fr-FR" sz="6000" b="1" dirty="0" smtClean="0"/>
+              <a:rPr lang="fr-FR" sz="5400" b="1" dirty="0" smtClean="0"/>
               <a:t> </a:t>
             </a:r>
             <a:r>
-              <a:rPr lang="fr-FR" sz="6000" b="1" dirty="0" err="1" smtClean="0"/>
+              <a:rPr lang="fr-FR" sz="5400" b="1" dirty="0" err="1" smtClean="0"/>
               <a:t>koa</a:t>
             </a:r>
             <a:r>
-              <a:rPr lang="fr-FR" sz="6000" b="1" dirty="0" smtClean="0"/>
+              <a:rPr lang="fr-FR" sz="5400" b="1" dirty="0" smtClean="0"/>
               <a:t/>
             </a:r>
             <a:br>
-              <a:rPr lang="fr-FR" sz="6000" b="1" dirty="0" smtClean="0"/>
+              <a:rPr lang="fr-FR" sz="5400" b="1" dirty="0" smtClean="0"/>
             </a:br>
             <a:r>
-              <a:rPr lang="fr-FR" sz="6000" b="1" dirty="0" smtClean="0"/>
+              <a:rPr lang="fr-FR" sz="5400" b="1" dirty="0" smtClean="0"/>
               <a:t>    </a:t>
             </a:r>
             <a:r>
-              <a:rPr lang="fr-FR" sz="6000" b="1" dirty="0" err="1" smtClean="0"/>
+              <a:rPr lang="fr-FR" sz="5400" b="1" dirty="0" err="1" smtClean="0"/>
               <a:t>Nomeko</a:t>
             </a:r>
             <a:r>
-              <a:rPr lang="fr-FR" sz="6000" b="1" dirty="0" smtClean="0"/>
+              <a:rPr lang="fr-FR" sz="5400" b="1" dirty="0" smtClean="0"/>
               <a:t> ho </a:t>
             </a:r>
             <a:r>
-              <a:rPr lang="fr-FR" sz="6000" b="1" dirty="0" err="1" smtClean="0"/>
+              <a:rPr lang="fr-FR" sz="5400" b="1" dirty="0" err="1" smtClean="0"/>
               <a:t>anao</a:t>
             </a:r>
             <a:r>
-              <a:rPr lang="fr-FR" sz="6000" b="1" dirty="0" smtClean="0"/>
+              <a:rPr lang="fr-FR" sz="5400" b="1" dirty="0" smtClean="0"/>
               <a:t> ;</a:t>
             </a:r>
             <a:br>
-              <a:rPr lang="fr-FR" sz="6000" b="1" dirty="0" smtClean="0"/>
+              <a:rPr lang="fr-FR" sz="5400" b="1" dirty="0" smtClean="0"/>
             </a:br>
             <a:r>
-              <a:rPr lang="fr-FR" sz="6000" b="1" dirty="0" smtClean="0"/>
+              <a:rPr lang="fr-FR" sz="5400" b="1" dirty="0" smtClean="0"/>
               <a:t>   </a:t>
             </a:r>
             <a:r>
-              <a:rPr lang="fr-FR" sz="6000" b="1" dirty="0" err="1" smtClean="0"/>
+              <a:rPr lang="fr-FR" sz="5400" b="1" dirty="0" err="1" smtClean="0"/>
               <a:t>Tsy</a:t>
             </a:r>
             <a:r>
-              <a:rPr lang="fr-FR" sz="6000" b="1" dirty="0" smtClean="0"/>
+              <a:rPr lang="fr-FR" sz="5400" b="1" dirty="0" smtClean="0"/>
               <a:t> </a:t>
             </a:r>
             <a:r>
-              <a:rPr lang="fr-FR" sz="6000" b="1" dirty="0" err="1" smtClean="0"/>
+              <a:rPr lang="fr-FR" sz="5400" b="1" dirty="0" err="1" smtClean="0"/>
               <a:t>misy</a:t>
             </a:r>
             <a:r>
-              <a:rPr lang="fr-FR" sz="6000" b="1" dirty="0" smtClean="0"/>
+              <a:rPr lang="fr-FR" sz="5400" b="1" dirty="0" smtClean="0"/>
               <a:t> </a:t>
             </a:r>
             <a:r>
-              <a:rPr lang="fr-FR" sz="6000" b="1" dirty="0" err="1" smtClean="0"/>
+              <a:rPr lang="fr-FR" sz="5400" b="1" dirty="0" err="1" smtClean="0"/>
               <a:t>zava</a:t>
             </a:r>
             <a:r>
-              <a:rPr lang="fr-FR" sz="6000" b="1" dirty="0" smtClean="0"/>
+              <a:rPr lang="fr-FR" sz="5400" b="1" dirty="0" smtClean="0"/>
               <a:t>-</a:t>
             </a:r>
             <a:r>
-              <a:rPr lang="fr-FR" sz="6000" b="1" dirty="0" err="1" smtClean="0"/>
+              <a:rPr lang="fr-FR" sz="5400" b="1" dirty="0" err="1" smtClean="0"/>
               <a:t>tsoa</a:t>
             </a:r>
             <a:r>
-              <a:rPr lang="fr-FR" sz="6000" b="1" dirty="0" smtClean="0"/>
+              <a:rPr lang="fr-FR" sz="5400" b="1" dirty="0" smtClean="0"/>
               <a:t/>
             </a:r>
             <a:br>
-              <a:rPr lang="fr-FR" sz="6000" b="1" dirty="0" smtClean="0"/>
+              <a:rPr lang="fr-FR" sz="5400" b="1" dirty="0" smtClean="0"/>
             </a:br>
             <a:r>
-              <a:rPr lang="fr-FR" sz="6000" b="1" dirty="0" smtClean="0"/>
+              <a:rPr lang="fr-FR" sz="5400" b="1" dirty="0" smtClean="0"/>
               <a:t>    </a:t>
             </a:r>
             <a:r>
-              <a:rPr lang="fr-FR" sz="6000" b="1" dirty="0" err="1" smtClean="0"/>
+              <a:rPr lang="fr-FR" sz="5400" b="1" dirty="0" err="1" smtClean="0"/>
               <a:t>Tsy</a:t>
             </a:r>
             <a:r>
-              <a:rPr lang="fr-FR" sz="6000" b="1" dirty="0" smtClean="0"/>
+              <a:rPr lang="fr-FR" sz="5400" b="1" dirty="0" smtClean="0"/>
               <a:t> </a:t>
             </a:r>
             <a:r>
-              <a:rPr lang="fr-FR" sz="6000" b="1" dirty="0" err="1" smtClean="0"/>
+              <a:rPr lang="fr-FR" sz="5400" b="1" dirty="0" err="1" smtClean="0"/>
               <a:t>foiko</a:t>
             </a:r>
             <a:r>
-              <a:rPr lang="fr-FR" sz="6000" b="1" dirty="0" smtClean="0"/>
+              <a:rPr lang="fr-FR" sz="5400" b="1" dirty="0" smtClean="0"/>
               <a:t> ho </a:t>
             </a:r>
             <a:r>
-              <a:rPr lang="fr-FR" sz="6000" b="1" dirty="0" err="1" smtClean="0"/>
+              <a:rPr lang="fr-FR" sz="5400" b="1" dirty="0" err="1" smtClean="0"/>
               <a:t>anao</a:t>
             </a:r>
             <a:r>
-              <a:rPr lang="fr-FR" sz="6000" b="1" dirty="0" smtClean="0"/>
+              <a:rPr lang="fr-FR" sz="5400" b="1" dirty="0" smtClean="0"/>
               <a:t> :</a:t>
             </a:r>
             <a:br>
-              <a:rPr lang="fr-FR" sz="6000" b="1" dirty="0" smtClean="0"/>
+              <a:rPr lang="fr-FR" sz="5400" b="1" dirty="0" smtClean="0"/>
             </a:br>
             <a:r>
-              <a:rPr lang="fr-FR" sz="6000" b="1" dirty="0" smtClean="0">
-                <a:solidFill>
-                  <a:srgbClr val="FF0000"/>
-                </a:solidFill>
-              </a:rPr>
+              <a:rPr lang="fr-FR" sz="5400" b="1" dirty="0" smtClean="0"/>
               <a:t>   :,: </a:t>
             </a:r>
             <a:r>
-              <a:rPr lang="fr-FR" sz="6000" b="1" dirty="0" err="1" smtClean="0">
-                <a:solidFill>
-                  <a:srgbClr val="FF0000"/>
-                </a:solidFill>
-              </a:rPr>
+              <a:rPr lang="fr-FR" sz="5400" b="1" dirty="0" err="1" smtClean="0"/>
               <a:t>Hevero</a:t>
             </a:r>
             <a:r>
-              <a:rPr lang="fr-FR" sz="6000" b="1" dirty="0" smtClean="0">
-                <a:solidFill>
-                  <a:srgbClr val="FF0000"/>
-                </a:solidFill>
-              </a:rPr>
+              <a:rPr lang="fr-FR" sz="5400" b="1" dirty="0" smtClean="0"/>
               <a:t>, ka </a:t>
             </a:r>
             <a:r>
-              <a:rPr lang="fr-FR" sz="6000" b="1" dirty="0" err="1" smtClean="0">
-                <a:solidFill>
-                  <a:srgbClr val="FF0000"/>
-                </a:solidFill>
-              </a:rPr>
+              <a:rPr lang="fr-FR" sz="5400" b="1" dirty="0" err="1" smtClean="0"/>
               <a:t>lazao</a:t>
             </a:r>
             <a:r>
-              <a:rPr lang="fr-FR" sz="6000" b="1" dirty="0" smtClean="0">
-                <a:solidFill>
-                  <a:srgbClr val="FF0000"/>
-                </a:solidFill>
-              </a:rPr>
+              <a:rPr lang="fr-FR" sz="5400" b="1" dirty="0" smtClean="0"/>
               <a:t>, </a:t>
             </a:r>
             <a:r>
-              <a:rPr lang="fr-FR" sz="6000" b="1" dirty="0" err="1" smtClean="0">
-                <a:solidFill>
-                  <a:srgbClr val="FF0000"/>
-                </a:solidFill>
-              </a:rPr>
+              <a:rPr lang="fr-FR" sz="5400" b="1" dirty="0" err="1" smtClean="0"/>
               <a:t>lazao</a:t>
             </a:r>
             <a:r>
-              <a:rPr lang="fr-FR" sz="6000" b="1" dirty="0" smtClean="0">
-                <a:solidFill>
-                  <a:srgbClr val="FF0000"/>
-                </a:solidFill>
-              </a:rPr>
+              <a:rPr lang="fr-FR" sz="5400" b="1" dirty="0" smtClean="0"/>
               <a:t/>
             </a:r>
             <a:br>
-              <a:rPr lang="fr-FR" sz="6000" b="1" dirty="0" smtClean="0">
-                <a:solidFill>
-                  <a:srgbClr val="FF0000"/>
-                </a:solidFill>
-              </a:rPr>
+              <a:rPr lang="fr-FR" sz="5400" b="1" dirty="0" smtClean="0"/>
             </a:br>
             <a:r>
-              <a:rPr lang="fr-FR" sz="6000" b="1" dirty="0" smtClean="0">
-                <a:solidFill>
-                  <a:srgbClr val="FF0000"/>
-                </a:solidFill>
-              </a:rPr>
+              <a:rPr lang="fr-FR" sz="5400" b="1" dirty="0" smtClean="0"/>
               <a:t>    </a:t>
             </a:r>
             <a:r>
-              <a:rPr lang="fr-FR" sz="6000" b="1" dirty="0" err="1" smtClean="0">
-                <a:solidFill>
-                  <a:srgbClr val="FF0000"/>
-                </a:solidFill>
-              </a:rPr>
+              <a:rPr lang="fr-FR" sz="5400" b="1" dirty="0" err="1" smtClean="0"/>
               <a:t>Izay</a:t>
             </a:r>
             <a:r>
-              <a:rPr lang="fr-FR" sz="6000" b="1" dirty="0" smtClean="0">
-                <a:solidFill>
-                  <a:srgbClr val="FF0000"/>
-                </a:solidFill>
-              </a:rPr>
+              <a:rPr lang="fr-FR" sz="5400" b="1" dirty="0" smtClean="0"/>
               <a:t> </a:t>
             </a:r>
             <a:r>
-              <a:rPr lang="fr-FR" sz="6000" b="1" dirty="0" err="1" smtClean="0">
-                <a:solidFill>
-                  <a:srgbClr val="FF0000"/>
-                </a:solidFill>
-              </a:rPr>
+              <a:rPr lang="fr-FR" sz="5400" b="1" dirty="0" err="1" smtClean="0"/>
               <a:t>mba</a:t>
             </a:r>
             <a:r>
-              <a:rPr lang="fr-FR" sz="6000" b="1" dirty="0" smtClean="0">
-                <a:solidFill>
-                  <a:srgbClr val="FF0000"/>
-                </a:solidFill>
-              </a:rPr>
+              <a:rPr lang="fr-FR" sz="5400" b="1" dirty="0" smtClean="0"/>
               <a:t> </a:t>
             </a:r>
             <a:r>
-              <a:rPr lang="fr-FR" sz="6000" b="1" dirty="0" err="1" smtClean="0">
-                <a:solidFill>
-                  <a:srgbClr val="FF0000"/>
-                </a:solidFill>
-              </a:rPr>
+              <a:rPr lang="fr-FR" sz="5400" b="1" dirty="0" err="1" smtClean="0"/>
               <a:t>taminao</a:t>
             </a:r>
             <a:r>
-              <a:rPr lang="fr-FR" sz="6000" b="1" dirty="0" smtClean="0">
-                <a:solidFill>
-                  <a:srgbClr val="FF0000"/>
-                </a:solidFill>
-              </a:rPr>
+              <a:rPr lang="fr-FR" sz="5400" b="1" dirty="0" smtClean="0"/>
               <a:t> :,:</a:t>
             </a:r>
-            <a:endParaRPr lang="fr-FR" sz="6000" b="1" dirty="0">
-              <a:solidFill>
-                <a:srgbClr val="FF0000"/>
-              </a:solidFill>
-            </a:endParaRPr>
+            <a:endParaRPr lang="fr-FR" sz="5400" b="1" dirty="0"/>
           </a:p>
         </p:txBody>
       </p:sp>
@@ -4259,6 +4032,13 @@
   <p:clrMapOvr>
     <a:masterClrMapping/>
   </p:clrMapOvr>
+  <p:timing>
+    <p:tnLst>
+      <p:par>
+        <p:cTn id="1" dur="indefinite" restart="never" nodeType="tmRoot"/>
+      </p:par>
+    </p:tnLst>
+  </p:timing>
 </p:sld>
 </file>
 
@@ -4434,145 +4214,73 @@
               <a:rPr lang="fr-FR" sz="5400" b="1" dirty="0" smtClean="0"/>
             </a:br>
             <a:r>
-              <a:rPr lang="fr-FR" sz="5400" b="1" dirty="0" smtClean="0">
-                <a:solidFill>
-                  <a:srgbClr val="FF0000"/>
-                </a:solidFill>
-              </a:rPr>
+              <a:rPr lang="fr-FR" sz="5400" b="1" dirty="0" smtClean="0"/>
               <a:t>   :,: </a:t>
             </a:r>
             <a:r>
-              <a:rPr lang="fr-FR" sz="5400" b="1" dirty="0" err="1" smtClean="0">
-                <a:solidFill>
-                  <a:srgbClr val="FF0000"/>
-                </a:solidFill>
-              </a:rPr>
+              <a:rPr lang="fr-FR" sz="5400" b="1" dirty="0" err="1" smtClean="0"/>
               <a:t>Ny</a:t>
             </a:r>
             <a:r>
-              <a:rPr lang="fr-FR" sz="5400" b="1" dirty="0" smtClean="0">
-                <a:solidFill>
-                  <a:srgbClr val="FF0000"/>
-                </a:solidFill>
-              </a:rPr>
+              <a:rPr lang="fr-FR" sz="5400" b="1" dirty="0" smtClean="0"/>
               <a:t> </a:t>
             </a:r>
             <a:r>
-              <a:rPr lang="fr-FR" sz="5400" b="1" dirty="0" err="1" smtClean="0">
-                <a:solidFill>
-                  <a:srgbClr val="FF0000"/>
-                </a:solidFill>
-              </a:rPr>
+              <a:rPr lang="fr-FR" sz="5400" b="1" dirty="0" err="1" smtClean="0"/>
               <a:t>aiko</a:t>
             </a:r>
             <a:r>
-              <a:rPr lang="fr-FR" sz="5400" b="1" dirty="0" smtClean="0">
-                <a:solidFill>
-                  <a:srgbClr val="FF0000"/>
-                </a:solidFill>
-              </a:rPr>
+              <a:rPr lang="fr-FR" sz="5400" b="1" dirty="0" smtClean="0"/>
               <a:t> no </a:t>
             </a:r>
             <a:r>
-              <a:rPr lang="fr-FR" sz="5400" b="1" dirty="0" err="1" smtClean="0">
-                <a:solidFill>
-                  <a:srgbClr val="FF0000"/>
-                </a:solidFill>
-              </a:rPr>
+              <a:rPr lang="fr-FR" sz="5400" b="1" dirty="0" err="1" smtClean="0"/>
               <a:t>mba</a:t>
             </a:r>
             <a:r>
-              <a:rPr lang="fr-FR" sz="5400" b="1" dirty="0" smtClean="0">
-                <a:solidFill>
-                  <a:srgbClr val="FF0000"/>
-                </a:solidFill>
-              </a:rPr>
+              <a:rPr lang="fr-FR" sz="5400" b="1" dirty="0" smtClean="0"/>
               <a:t> </a:t>
             </a:r>
             <a:r>
-              <a:rPr lang="fr-FR" sz="5400" b="1" dirty="0" err="1" smtClean="0">
-                <a:solidFill>
-                  <a:srgbClr val="FF0000"/>
-                </a:solidFill>
-              </a:rPr>
+              <a:rPr lang="fr-FR" sz="5400" b="1" dirty="0" err="1" smtClean="0"/>
               <a:t>raisonao</a:t>
             </a:r>
             <a:r>
-              <a:rPr lang="fr-FR" sz="5400" b="1" dirty="0" smtClean="0">
-                <a:solidFill>
-                  <a:srgbClr val="FF0000"/>
-                </a:solidFill>
-              </a:rPr>
+              <a:rPr lang="fr-FR" sz="5400" b="1" dirty="0" smtClean="0"/>
               <a:t/>
             </a:r>
             <a:br>
-              <a:rPr lang="fr-FR" sz="5400" b="1" dirty="0" smtClean="0">
-                <a:solidFill>
-                  <a:srgbClr val="FF0000"/>
-                </a:solidFill>
-              </a:rPr>
+              <a:rPr lang="fr-FR" sz="5400" b="1" dirty="0" smtClean="0"/>
             </a:br>
             <a:r>
-              <a:rPr lang="fr-FR" sz="5400" b="1" dirty="0" smtClean="0">
-                <a:solidFill>
-                  <a:srgbClr val="FF0000"/>
-                </a:solidFill>
-              </a:rPr>
+              <a:rPr lang="fr-FR" sz="5400" b="1" dirty="0" smtClean="0"/>
               <a:t>    </a:t>
             </a:r>
             <a:r>
-              <a:rPr lang="fr-FR" sz="5400" b="1" dirty="0" err="1" smtClean="0">
-                <a:solidFill>
-                  <a:srgbClr val="FF0000"/>
-                </a:solidFill>
-              </a:rPr>
+              <a:rPr lang="fr-FR" sz="5400" b="1" dirty="0" err="1" smtClean="0"/>
               <a:t>Hanao</a:t>
             </a:r>
             <a:r>
-              <a:rPr lang="fr-FR" sz="5400" b="1" dirty="0" smtClean="0">
-                <a:solidFill>
-                  <a:srgbClr val="FF0000"/>
-                </a:solidFill>
-              </a:rPr>
+              <a:rPr lang="fr-FR" sz="5400" b="1" dirty="0" smtClean="0"/>
               <a:t> </a:t>
             </a:r>
             <a:r>
-              <a:rPr lang="fr-FR" sz="5400" b="1" dirty="0" err="1" smtClean="0">
-                <a:solidFill>
-                  <a:srgbClr val="FF0000"/>
-                </a:solidFill>
-              </a:rPr>
+              <a:rPr lang="fr-FR" sz="5400" b="1" dirty="0" err="1" smtClean="0"/>
               <a:t>ny</a:t>
             </a:r>
             <a:r>
-              <a:rPr lang="fr-FR" sz="5400" b="1" dirty="0" smtClean="0">
-                <a:solidFill>
-                  <a:srgbClr val="FF0000"/>
-                </a:solidFill>
-              </a:rPr>
+              <a:rPr lang="fr-FR" sz="5400" b="1" dirty="0" smtClean="0"/>
               <a:t> </a:t>
             </a:r>
             <a:r>
-              <a:rPr lang="fr-FR" sz="5400" b="1" dirty="0" err="1" smtClean="0">
-                <a:solidFill>
-                  <a:srgbClr val="FF0000"/>
-                </a:solidFill>
-              </a:rPr>
+              <a:rPr lang="fr-FR" sz="5400" b="1" dirty="0" err="1" smtClean="0"/>
               <a:t>sitrakao</a:t>
             </a:r>
             <a:r>
-              <a:rPr lang="fr-FR" sz="5400" b="1" dirty="0" smtClean="0">
-                <a:solidFill>
-                  <a:srgbClr val="FF0000"/>
-                </a:solidFill>
-              </a:rPr>
+              <a:rPr lang="fr-FR" sz="5400" b="1" dirty="0" smtClean="0"/>
               <a:t> :,:</a:t>
             </a:r>
-            <a:endParaRPr lang="fr-FR" sz="5400" b="1" dirty="0">
-              <a:solidFill>
-                <a:srgbClr val="FF0000"/>
-              </a:solidFill>
-            </a:endParaRPr>
+            <a:endParaRPr lang="fr-FR" sz="5400" b="1" dirty="0"/>
           </a:p>
         </p:txBody>
       </p:sp>
